--- a/Tp5/TP5_Ejercicio4.pptx
+++ b/Tp5/TP5_Ejercicio4.pptx
@@ -4084,8 +4084,10 @@
                 </a:solidFill>
                 <a:latin typeface="Consolas" pitchFamily="34" charset="0"/>
               </a:rPr>
-              <a:t> = filtro_pto4; % crear el filtro</a:t>
-            </a:r>
+              <a:t> = filtro_pto4; </a:t>
+            </a:r>
+          </a:p>
+          <a:p>
             <a:endParaRPr lang="en-US" sz="1000" dirty="0">
               <a:solidFill>
                 <a:srgbClr val="1A3060"/>
@@ -4141,19 +4143,6 @@
               </a:rPr>
               <a:t>filtro</a:t>
             </a:r>
-            <a:endParaRPr lang="en-US" sz="1000" dirty="0">
-              <a:solidFill>
-                <a:srgbClr val="1A3060"/>
-              </a:solidFill>
-              <a:latin typeface="Consolas" pitchFamily="34" charset="0"/>
-              <a:ea typeface="Consolas" pitchFamily="34" charset="-122"/>
-              <a:cs typeface="Consolas" pitchFamily="34" charset="-120"/>
-            </a:endParaRPr>
-          </a:p>
-          <a:p>
-            <a:pPr marL="0" indent="0">
-              <a:buNone/>
-            </a:pPr>
             <a:endParaRPr lang="en-US" sz="1000" dirty="0"/>
           </a:p>
           <a:p>

--- a/Tp5/TP5_Ejercicio4.pptx
+++ b/Tp5/TP5_Ejercicio4.pptx
@@ -5,15 +5,16 @@
     <p:sldMasterId id="2147483648" r:id="rId1"/>
   </p:sldMasterIdLst>
   <p:notesMasterIdLst>
-    <p:notesMasterId r:id="rId8"/>
+    <p:notesMasterId r:id="rId9"/>
   </p:notesMasterIdLst>
   <p:sldIdLst>
     <p:sldId id="256" r:id="rId2"/>
     <p:sldId id="257" r:id="rId3"/>
     <p:sldId id="258" r:id="rId4"/>
-    <p:sldId id="259" r:id="rId5"/>
-    <p:sldId id="260" r:id="rId6"/>
-    <p:sldId id="261" r:id="rId7"/>
+    <p:sldId id="262" r:id="rId5"/>
+    <p:sldId id="259" r:id="rId6"/>
+    <p:sldId id="260" r:id="rId7"/>
+    <p:sldId id="261" r:id="rId8"/>
   </p:sldIdLst>
   <p:sldSz cx="9144000" cy="5143500" type="screen16x9"/>
   <p:notesSz cx="5143500" cy="9144000"/>
@@ -568,7 +569,7 @@
     </p:spTree>
     <p:extLst>
       <p:ext uri="{BB962C8B-B14F-4D97-AF65-F5344CB8AC3E}">
-        <p14:creationId xmlns:p14="http://schemas.microsoft.com/office/powerpoint/2010/main" val="1024086991"/>
+        <p14:creationId xmlns:p14="http://schemas.microsoft.com/office/powerpoint/2010/main" val="3748328245"/>
       </p:ext>
     </p:extLst>
   </p:cSld>
@@ -728,6 +729,90 @@
             <a:fld id="{F7021451-1387-4CA6-816F-3879F97B5CBC}" type="slidenum">
               <a:rPr lang="en-US"/>
               <a:t>6</a:t>
+            </a:fld>
+            <a:endParaRPr lang="en-US"/>
+          </a:p>
+        </p:txBody>
+      </p:sp>
+    </p:spTree>
+    <p:extLst>
+      <p:ext uri="{BB962C8B-B14F-4D97-AF65-F5344CB8AC3E}">
+        <p14:creationId xmlns:p14="http://schemas.microsoft.com/office/powerpoint/2010/main" val="1024086991"/>
+      </p:ext>
+    </p:extLst>
+  </p:cSld>
+  <p:clrMapOvr>
+    <a:masterClrMapping/>
+  </p:clrMapOvr>
+</p:notes>
+</file>
+
+<file path=ppt/notesSlides/notesSlide7.xml><?xml version="1.0" encoding="utf-8"?>
+<p:notes xmlns:a="http://schemas.openxmlformats.org/drawingml/2006/main" xmlns:r="http://schemas.openxmlformats.org/officeDocument/2006/relationships" xmlns:p="http://schemas.openxmlformats.org/presentationml/2006/main">
+  <p:cSld>
+    <p:spTree>
+      <p:nvGrpSpPr>
+        <p:cNvPr id="1" name=""/>
+        <p:cNvGrpSpPr/>
+        <p:nvPr/>
+      </p:nvGrpSpPr>
+      <p:grpSpPr>
+        <a:xfrm>
+          <a:off x="0" y="0"/>
+          <a:ext cx="0" cy="0"/>
+          <a:chOff x="0" y="0"/>
+          <a:chExt cx="0" cy="0"/>
+        </a:xfrm>
+      </p:grpSpPr>
+      <p:sp>
+        <p:nvSpPr>
+          <p:cNvPr id="2" name="Slide Image Placeholder 1"/>
+          <p:cNvSpPr>
+            <a:spLocks noGrp="1" noRot="1" noChangeAspect="1"/>
+          </p:cNvSpPr>
+          <p:nvPr>
+            <p:ph type="sldImg"/>
+          </p:nvPr>
+        </p:nvSpPr>
+        <p:spPr/>
+      </p:sp>
+      <p:sp>
+        <p:nvSpPr>
+          <p:cNvPr id="3" name="Notes Placeholder 2"/>
+          <p:cNvSpPr>
+            <a:spLocks noGrp="1"/>
+          </p:cNvSpPr>
+          <p:nvPr>
+            <p:ph type="body" idx="1"/>
+          </p:nvPr>
+        </p:nvSpPr>
+        <p:spPr/>
+        <p:txBody>
+          <a:bodyPr/>
+          <a:lstStyle/>
+          <a:p>
+            <a:endParaRPr lang="en-US" dirty="0"/>
+          </a:p>
+        </p:txBody>
+      </p:sp>
+      <p:sp>
+        <p:nvSpPr>
+          <p:cNvPr id="4" name="Slide Number Placeholder 3"/>
+          <p:cNvSpPr>
+            <a:spLocks noGrp="1"/>
+          </p:cNvSpPr>
+          <p:nvPr>
+            <p:ph type="sldNum" sz="quarter" idx="10"/>
+          </p:nvPr>
+        </p:nvSpPr>
+        <p:spPr/>
+        <p:txBody>
+          <a:bodyPr/>
+          <a:lstStyle/>
+          <a:p>
+            <a:fld id="{F7021451-1387-4CA6-816F-3879F97B5CBC}" type="slidenum">
+              <a:rPr lang="en-US"/>
+              <a:t>7</a:t>
             </a:fld>
             <a:endParaRPr lang="en-US"/>
           </a:p>
@@ -3640,6 +3725,754 @@
 
 <file path=ppt/slides/slide4.xml><?xml version="1.0" encoding="utf-8"?>
 <p:sld xmlns:a="http://schemas.openxmlformats.org/drawingml/2006/main" xmlns:r="http://schemas.openxmlformats.org/officeDocument/2006/relationships" xmlns:p="http://schemas.openxmlformats.org/presentationml/2006/main">
+  <p:cSld>
+    <p:bg>
+      <p:bgPr>
+        <a:solidFill>
+          <a:srgbClr val="FFFFFF"/>
+        </a:solidFill>
+        <a:effectLst/>
+      </p:bgPr>
+    </p:bg>
+    <p:spTree>
+      <p:nvGrpSpPr>
+        <p:cNvPr id="1" name=""/>
+        <p:cNvGrpSpPr/>
+        <p:nvPr/>
+      </p:nvGrpSpPr>
+      <p:grpSpPr>
+        <a:xfrm>
+          <a:off x="0" y="0"/>
+          <a:ext cx="0" cy="0"/>
+          <a:chOff x="0" y="0"/>
+          <a:chExt cx="0" cy="0"/>
+        </a:xfrm>
+      </p:grpSpPr>
+      <p:sp>
+        <p:nvSpPr>
+          <p:cNvPr id="2" name="Shape 0"/>
+          <p:cNvSpPr/>
+          <p:nvPr/>
+        </p:nvSpPr>
+        <p:spPr>
+          <a:xfrm>
+            <a:off x="0" y="0"/>
+            <a:ext cx="9144000" cy="594360"/>
+          </a:xfrm>
+          <a:prstGeom prst="rect">
+            <a:avLst/>
+          </a:prstGeom>
+          <a:solidFill>
+            <a:srgbClr val="1E3A5F"/>
+          </a:solidFill>
+          <a:ln w="12700">
+            <a:solidFill>
+              <a:srgbClr val="1E3A5F"/>
+            </a:solidFill>
+            <a:prstDash val="solid"/>
+          </a:ln>
+        </p:spPr>
+      </p:sp>
+      <p:sp>
+        <p:nvSpPr>
+          <p:cNvPr id="3" name="Text 1"/>
+          <p:cNvSpPr/>
+          <p:nvPr/>
+        </p:nvSpPr>
+        <p:spPr>
+          <a:xfrm>
+            <a:off x="365760" y="0"/>
+            <a:ext cx="8412480" cy="594360"/>
+          </a:xfrm>
+          <a:prstGeom prst="rect">
+            <a:avLst/>
+          </a:prstGeom>
+          <a:noFill/>
+          <a:ln/>
+        </p:spPr>
+        <p:txBody>
+          <a:bodyPr wrap="square" lIns="0" tIns="0" rIns="0" bIns="0" rtlCol="0" anchor="ctr"/>
+          <a:lstStyle/>
+          <a:p>
+            <a:pPr marL="0" indent="0">
+              <a:buNone/>
+            </a:pPr>
+            <a:r>
+              <a:rPr lang="en-US" sz="2000" b="1" dirty="0">
+                <a:solidFill>
+                  <a:srgbClr val="FFFFFF"/>
+                </a:solidFill>
+                <a:latin typeface="Calibri" pitchFamily="34" charset="0"/>
+                <a:ea typeface="Calibri" pitchFamily="34" charset="-122"/>
+                <a:cs typeface="Calibri" pitchFamily="34" charset="-120"/>
+              </a:rPr>
+              <a:t>Puntos a–c: Diseño del Filtro</a:t>
+            </a:r>
+            <a:endParaRPr lang="en-US" sz="2000" dirty="0"/>
+          </a:p>
+        </p:txBody>
+      </p:sp>
+      <p:sp>
+        <p:nvSpPr>
+          <p:cNvPr id="22" name="Shape 20"/>
+          <p:cNvSpPr/>
+          <p:nvPr/>
+        </p:nvSpPr>
+        <p:spPr>
+          <a:xfrm>
+            <a:off x="264160" y="1188720"/>
+            <a:ext cx="8559800" cy="3830320"/>
+          </a:xfrm>
+          <a:prstGeom prst="rect">
+            <a:avLst/>
+          </a:prstGeom>
+          <a:solidFill>
+            <a:srgbClr val="F5F5F5"/>
+          </a:solidFill>
+          <a:ln w="6350">
+            <a:solidFill>
+              <a:srgbClr val="CCCCCC"/>
+            </a:solidFill>
+            <a:prstDash val="solid"/>
+          </a:ln>
+        </p:spPr>
+        <p:txBody>
+          <a:bodyPr/>
+          <a:lstStyle/>
+          <a:p>
+            <a:r>
+              <a:rPr lang="es-AR" sz="1200" b="0" i="0" dirty="0">
+                <a:solidFill>
+                  <a:srgbClr val="008013"/>
+                </a:solidFill>
+                <a:effectLst/>
+                <a:latin typeface="Menlo"/>
+              </a:rPr>
+              <a:t>% Comparación N=10, N=100 y N=1000</a:t>
+            </a:r>
+            <a:endParaRPr lang="es-AR" sz="1200" b="0" i="0" dirty="0">
+              <a:effectLst/>
+              <a:latin typeface="Menlo"/>
+            </a:endParaRPr>
+          </a:p>
+          <a:p>
+            <a:r>
+              <a:rPr lang="es-AR" sz="1200" b="0" i="0" dirty="0">
+                <a:effectLst/>
+                <a:latin typeface="Menlo"/>
+              </a:rPr>
+              <a:t>Hd10 = Copy_of_filtro_pto4; </a:t>
+            </a:r>
+            <a:r>
+              <a:rPr lang="es-AR" sz="1200" b="0" i="0" dirty="0">
+                <a:solidFill>
+                  <a:srgbClr val="008013"/>
+                </a:solidFill>
+                <a:effectLst/>
+                <a:latin typeface="Menlo"/>
+              </a:rPr>
+              <a:t>% crear el filtro</a:t>
+            </a:r>
+            <a:endParaRPr lang="es-AR" sz="1200" b="0" i="0" dirty="0">
+              <a:effectLst/>
+              <a:latin typeface="Menlo"/>
+            </a:endParaRPr>
+          </a:p>
+          <a:p>
+            <a:r>
+              <a:rPr lang="es-AR" sz="1200" b="0" i="0" dirty="0">
+                <a:effectLst/>
+                <a:latin typeface="Menlo"/>
+              </a:rPr>
+              <a:t>hd1000 = Copy_2_of_filtro_pto4;</a:t>
+            </a:r>
+          </a:p>
+          <a:p>
+            <a:r>
+              <a:rPr lang="es-AR" sz="1200" b="0" i="0" dirty="0">
+                <a:effectLst/>
+                <a:latin typeface="Menlo"/>
+              </a:rPr>
+              <a:t>b10 = Hd10.Numerator;</a:t>
+            </a:r>
+          </a:p>
+          <a:p>
+            <a:r>
+              <a:rPr lang="es-AR" sz="1200" b="0" i="0" dirty="0">
+                <a:effectLst/>
+                <a:latin typeface="Menlo"/>
+              </a:rPr>
+              <a:t>b100 = </a:t>
+            </a:r>
+            <a:r>
+              <a:rPr lang="es-AR" sz="1200" b="0" i="0" dirty="0" err="1">
+                <a:effectLst/>
+                <a:latin typeface="Menlo"/>
+              </a:rPr>
+              <a:t>Hd.Numerator</a:t>
+            </a:r>
+            <a:r>
+              <a:rPr lang="es-AR" sz="1200" b="0" i="0" dirty="0">
+                <a:effectLst/>
+                <a:latin typeface="Menlo"/>
+              </a:rPr>
+              <a:t>;</a:t>
+            </a:r>
+          </a:p>
+          <a:p>
+            <a:r>
+              <a:rPr lang="es-AR" sz="1200" b="0" i="0" dirty="0">
+                <a:effectLst/>
+                <a:latin typeface="Menlo"/>
+              </a:rPr>
+              <a:t>b1000 = hd1000.Numerator;</a:t>
+            </a:r>
+          </a:p>
+          <a:p>
+            <a:endParaRPr lang="es-AR" sz="1200" b="0" i="0" dirty="0">
+              <a:effectLst/>
+              <a:latin typeface="Menlo"/>
+            </a:endParaRPr>
+          </a:p>
+          <a:p>
+            <a:r>
+              <a:rPr lang="es-AR" sz="1200" b="0" i="0" dirty="0">
+                <a:effectLst/>
+                <a:latin typeface="Menlo"/>
+              </a:rPr>
+              <a:t>[H10, f] = </a:t>
+            </a:r>
+            <a:r>
+              <a:rPr lang="es-AR" sz="1200" b="0" i="0" dirty="0" err="1">
+                <a:effectLst/>
+                <a:latin typeface="Menlo"/>
+              </a:rPr>
+              <a:t>freqz</a:t>
+            </a:r>
+            <a:r>
+              <a:rPr lang="es-AR" sz="1200" b="0" i="0" dirty="0">
+                <a:effectLst/>
+                <a:latin typeface="Menlo"/>
+              </a:rPr>
+              <a:t>(b10, 1, 1024, 44100);</a:t>
+            </a:r>
+          </a:p>
+          <a:p>
+            <a:r>
+              <a:rPr lang="es-AR" sz="1200" b="0" i="0" dirty="0">
+                <a:effectLst/>
+                <a:latin typeface="Menlo"/>
+              </a:rPr>
+              <a:t>[H100, ~] = </a:t>
+            </a:r>
+            <a:r>
+              <a:rPr lang="es-AR" sz="1200" b="0" i="0" dirty="0" err="1">
+                <a:effectLst/>
+                <a:latin typeface="Menlo"/>
+              </a:rPr>
+              <a:t>freqz</a:t>
+            </a:r>
+            <a:r>
+              <a:rPr lang="es-AR" sz="1200" b="0" i="0" dirty="0">
+                <a:effectLst/>
+                <a:latin typeface="Menlo"/>
+              </a:rPr>
+              <a:t>(b100, 1, 1024, 44100);</a:t>
+            </a:r>
+          </a:p>
+          <a:p>
+            <a:r>
+              <a:rPr lang="es-AR" sz="1200" b="0" i="0" dirty="0">
+                <a:effectLst/>
+                <a:latin typeface="Menlo"/>
+              </a:rPr>
+              <a:t>[H1000, ~] = </a:t>
+            </a:r>
+            <a:r>
+              <a:rPr lang="es-AR" sz="1200" b="0" i="0" dirty="0" err="1">
+                <a:effectLst/>
+                <a:latin typeface="Menlo"/>
+              </a:rPr>
+              <a:t>freqz</a:t>
+            </a:r>
+            <a:r>
+              <a:rPr lang="es-AR" sz="1200" b="0" i="0" dirty="0">
+                <a:effectLst/>
+                <a:latin typeface="Menlo"/>
+              </a:rPr>
+              <a:t>(b1000, 1, 1024, 44100);</a:t>
+            </a:r>
+          </a:p>
+          <a:p>
+            <a:endParaRPr lang="es-AR" sz="1200" b="0" i="0" dirty="0">
+              <a:effectLst/>
+              <a:latin typeface="Menlo"/>
+            </a:endParaRPr>
+          </a:p>
+          <a:p>
+            <a:r>
+              <a:rPr lang="es-AR" sz="1200" b="0" i="0" dirty="0">
+                <a:effectLst/>
+                <a:latin typeface="Menlo"/>
+              </a:rPr>
+              <a:t>figure;</a:t>
+            </a:r>
+          </a:p>
+          <a:p>
+            <a:r>
+              <a:rPr lang="es-AR" sz="1200" b="0" i="0" dirty="0" err="1">
+                <a:effectLst/>
+                <a:latin typeface="Menlo"/>
+              </a:rPr>
+              <a:t>plot</a:t>
+            </a:r>
+            <a:r>
+              <a:rPr lang="es-AR" sz="1200" b="0" i="0" dirty="0">
+                <a:effectLst/>
+                <a:latin typeface="Menlo"/>
+              </a:rPr>
+              <a:t>(f, 20*log10(</a:t>
+            </a:r>
+            <a:r>
+              <a:rPr lang="es-AR" sz="1200" b="0" i="0" dirty="0" err="1">
+                <a:effectLst/>
+                <a:latin typeface="Menlo"/>
+              </a:rPr>
+              <a:t>abs</a:t>
+            </a:r>
+            <a:r>
+              <a:rPr lang="es-AR" sz="1200" b="0" i="0" dirty="0">
+                <a:effectLst/>
+                <a:latin typeface="Menlo"/>
+              </a:rPr>
+              <a:t>(H10)), </a:t>
+            </a:r>
+            <a:r>
+              <a:rPr lang="es-AR" sz="1200" b="0" i="0" dirty="0">
+                <a:solidFill>
+                  <a:srgbClr val="A709F5"/>
+                </a:solidFill>
+                <a:effectLst/>
+                <a:latin typeface="Menlo"/>
+              </a:rPr>
+              <a:t>'r'</a:t>
+            </a:r>
+            <a:r>
+              <a:rPr lang="es-AR" sz="1200" b="0" i="0" dirty="0">
+                <a:effectLst/>
+                <a:latin typeface="Menlo"/>
+              </a:rPr>
+              <a:t>); </a:t>
+            </a:r>
+            <a:r>
+              <a:rPr lang="es-AR" sz="1200" b="0" i="0" dirty="0" err="1">
+                <a:effectLst/>
+                <a:latin typeface="Menlo"/>
+              </a:rPr>
+              <a:t>hold</a:t>
+            </a:r>
+            <a:r>
+              <a:rPr lang="es-AR" sz="1200" b="0" i="0" dirty="0">
+                <a:effectLst/>
+                <a:latin typeface="Menlo"/>
+              </a:rPr>
+              <a:t> </a:t>
+            </a:r>
+            <a:r>
+              <a:rPr lang="es-AR" sz="1200" b="0" i="0" dirty="0" err="1">
+                <a:solidFill>
+                  <a:srgbClr val="A709F5"/>
+                </a:solidFill>
+                <a:effectLst/>
+                <a:latin typeface="Menlo"/>
+              </a:rPr>
+              <a:t>on</a:t>
+            </a:r>
+            <a:r>
+              <a:rPr lang="es-AR" sz="1200" b="0" i="0" dirty="0">
+                <a:effectLst/>
+                <a:latin typeface="Menlo"/>
+              </a:rPr>
+              <a:t>;</a:t>
+            </a:r>
+          </a:p>
+          <a:p>
+            <a:r>
+              <a:rPr lang="es-AR" sz="1200" b="0" i="0" dirty="0" err="1">
+                <a:effectLst/>
+                <a:latin typeface="Menlo"/>
+              </a:rPr>
+              <a:t>plot</a:t>
+            </a:r>
+            <a:r>
+              <a:rPr lang="es-AR" sz="1200" b="0" i="0" dirty="0">
+                <a:effectLst/>
+                <a:latin typeface="Menlo"/>
+              </a:rPr>
+              <a:t>(f, 20*log10(</a:t>
+            </a:r>
+            <a:r>
+              <a:rPr lang="es-AR" sz="1200" b="0" i="0" dirty="0" err="1">
+                <a:effectLst/>
+                <a:latin typeface="Menlo"/>
+              </a:rPr>
+              <a:t>abs</a:t>
+            </a:r>
+            <a:r>
+              <a:rPr lang="es-AR" sz="1200" b="0" i="0" dirty="0">
+                <a:effectLst/>
+                <a:latin typeface="Menlo"/>
+              </a:rPr>
+              <a:t>(H100)), </a:t>
+            </a:r>
+            <a:r>
+              <a:rPr lang="es-AR" sz="1200" b="0" i="0" dirty="0">
+                <a:solidFill>
+                  <a:srgbClr val="A709F5"/>
+                </a:solidFill>
+                <a:effectLst/>
+                <a:latin typeface="Menlo"/>
+              </a:rPr>
+              <a:t>'b'</a:t>
+            </a:r>
+            <a:r>
+              <a:rPr lang="es-AR" sz="1200" b="0" i="0" dirty="0">
+                <a:effectLst/>
+                <a:latin typeface="Menlo"/>
+              </a:rPr>
+              <a:t>);</a:t>
+            </a:r>
+          </a:p>
+          <a:p>
+            <a:r>
+              <a:rPr lang="es-AR" sz="1200" b="0" i="0" dirty="0" err="1">
+                <a:effectLst/>
+                <a:latin typeface="Menlo"/>
+              </a:rPr>
+              <a:t>plot</a:t>
+            </a:r>
+            <a:r>
+              <a:rPr lang="es-AR" sz="1200" b="0" i="0" dirty="0">
+                <a:effectLst/>
+                <a:latin typeface="Menlo"/>
+              </a:rPr>
+              <a:t>(f, 20*log10(</a:t>
+            </a:r>
+            <a:r>
+              <a:rPr lang="es-AR" sz="1200" b="0" i="0" dirty="0" err="1">
+                <a:effectLst/>
+                <a:latin typeface="Menlo"/>
+              </a:rPr>
+              <a:t>abs</a:t>
+            </a:r>
+            <a:r>
+              <a:rPr lang="es-AR" sz="1200" b="0" i="0" dirty="0">
+                <a:effectLst/>
+                <a:latin typeface="Menlo"/>
+              </a:rPr>
+              <a:t>(H1000)), </a:t>
+            </a:r>
+            <a:r>
+              <a:rPr lang="es-AR" sz="1200" b="0" i="0" dirty="0">
+                <a:solidFill>
+                  <a:srgbClr val="A709F5"/>
+                </a:solidFill>
+                <a:effectLst/>
+                <a:latin typeface="Menlo"/>
+              </a:rPr>
+              <a:t>'g'</a:t>
+            </a:r>
+            <a:r>
+              <a:rPr lang="es-AR" sz="1200" b="0" i="0" dirty="0">
+                <a:effectLst/>
+                <a:latin typeface="Menlo"/>
+              </a:rPr>
+              <a:t>);</a:t>
+            </a:r>
+          </a:p>
+          <a:p>
+            <a:r>
+              <a:rPr lang="es-AR" sz="1200" b="0" i="0" dirty="0" err="1">
+                <a:effectLst/>
+                <a:latin typeface="Menlo"/>
+              </a:rPr>
+              <a:t>legend</a:t>
+            </a:r>
+            <a:r>
+              <a:rPr lang="es-AR" sz="1200" b="0" i="0" dirty="0">
+                <a:effectLst/>
+                <a:latin typeface="Menlo"/>
+              </a:rPr>
+              <a:t>(</a:t>
+            </a:r>
+            <a:r>
+              <a:rPr lang="es-AR" sz="1200" b="0" i="0" dirty="0">
+                <a:solidFill>
+                  <a:srgbClr val="A709F5"/>
+                </a:solidFill>
+                <a:effectLst/>
+                <a:latin typeface="Menlo"/>
+              </a:rPr>
+              <a:t>'N=10'</a:t>
+            </a:r>
+            <a:r>
+              <a:rPr lang="es-AR" sz="1200" b="0" i="0" dirty="0">
+                <a:effectLst/>
+                <a:latin typeface="Menlo"/>
+              </a:rPr>
+              <a:t>, </a:t>
+            </a:r>
+            <a:r>
+              <a:rPr lang="es-AR" sz="1200" b="0" i="0" dirty="0">
+                <a:solidFill>
+                  <a:srgbClr val="A709F5"/>
+                </a:solidFill>
+                <a:effectLst/>
+                <a:latin typeface="Menlo"/>
+              </a:rPr>
+              <a:t>'N=100'</a:t>
+            </a:r>
+            <a:r>
+              <a:rPr lang="es-AR" sz="1200" b="0" i="0" dirty="0">
+                <a:effectLst/>
+                <a:latin typeface="Menlo"/>
+              </a:rPr>
+              <a:t>, </a:t>
+            </a:r>
+            <a:r>
+              <a:rPr lang="es-AR" sz="1200" b="0" i="0" dirty="0">
+                <a:solidFill>
+                  <a:srgbClr val="A709F5"/>
+                </a:solidFill>
+                <a:effectLst/>
+                <a:latin typeface="Menlo"/>
+              </a:rPr>
+              <a:t>'N=1000'</a:t>
+            </a:r>
+            <a:r>
+              <a:rPr lang="es-AR" sz="1200" b="0" i="0" dirty="0">
+                <a:effectLst/>
+                <a:latin typeface="Menlo"/>
+              </a:rPr>
+              <a:t>);</a:t>
+            </a:r>
+          </a:p>
+          <a:p>
+            <a:r>
+              <a:rPr lang="es-AR" sz="1200" b="0" i="0" dirty="0" err="1">
+                <a:effectLst/>
+                <a:latin typeface="Menlo"/>
+              </a:rPr>
+              <a:t>grid</a:t>
+            </a:r>
+            <a:r>
+              <a:rPr lang="es-AR" sz="1200" b="0" i="0" dirty="0">
+                <a:effectLst/>
+                <a:latin typeface="Menlo"/>
+              </a:rPr>
+              <a:t> </a:t>
+            </a:r>
+            <a:r>
+              <a:rPr lang="es-AR" sz="1200" b="0" i="0" dirty="0" err="1">
+                <a:solidFill>
+                  <a:srgbClr val="A709F5"/>
+                </a:solidFill>
+                <a:effectLst/>
+                <a:latin typeface="Menlo"/>
+              </a:rPr>
+              <a:t>on</a:t>
+            </a:r>
+            <a:r>
+              <a:rPr lang="es-AR" sz="1200" b="0" i="0" dirty="0">
+                <a:effectLst/>
+                <a:latin typeface="Menlo"/>
+              </a:rPr>
+              <a:t>;</a:t>
+            </a:r>
+          </a:p>
+          <a:p>
+            <a:r>
+              <a:rPr lang="es-AR" sz="1200" b="0" i="0" dirty="0" err="1">
+                <a:effectLst/>
+                <a:latin typeface="Menlo"/>
+              </a:rPr>
+              <a:t>xlabel</a:t>
+            </a:r>
+            <a:r>
+              <a:rPr lang="es-AR" sz="1200" b="0" i="0" dirty="0">
+                <a:effectLst/>
+                <a:latin typeface="Menlo"/>
+              </a:rPr>
+              <a:t>(</a:t>
+            </a:r>
+            <a:r>
+              <a:rPr lang="es-AR" sz="1200" b="0" i="0" dirty="0">
+                <a:solidFill>
+                  <a:srgbClr val="A709F5"/>
+                </a:solidFill>
+                <a:effectLst/>
+                <a:latin typeface="Menlo"/>
+              </a:rPr>
+              <a:t>'Frecuencia [Hz]'</a:t>
+            </a:r>
+            <a:r>
+              <a:rPr lang="es-AR" sz="1200" b="0" i="0" dirty="0">
+                <a:effectLst/>
+                <a:latin typeface="Menlo"/>
+              </a:rPr>
+              <a:t>);</a:t>
+            </a:r>
+          </a:p>
+          <a:p>
+            <a:r>
+              <a:rPr lang="es-AR" sz="1200" b="0" i="0" dirty="0" err="1">
+                <a:effectLst/>
+                <a:latin typeface="Menlo"/>
+              </a:rPr>
+              <a:t>ylabel</a:t>
+            </a:r>
+            <a:r>
+              <a:rPr lang="es-AR" sz="1200" b="0" i="0" dirty="0">
+                <a:effectLst/>
+                <a:latin typeface="Menlo"/>
+              </a:rPr>
+              <a:t>(</a:t>
+            </a:r>
+            <a:r>
+              <a:rPr lang="es-AR" sz="1200" b="0" i="0" dirty="0">
+                <a:solidFill>
+                  <a:srgbClr val="A709F5"/>
+                </a:solidFill>
+                <a:effectLst/>
+                <a:latin typeface="Menlo"/>
+              </a:rPr>
+              <a:t>'Magnitud [dB]'</a:t>
+            </a:r>
+            <a:r>
+              <a:rPr lang="es-AR" sz="1200" b="0" i="0" dirty="0">
+                <a:effectLst/>
+                <a:latin typeface="Menlo"/>
+              </a:rPr>
+              <a:t>);</a:t>
+            </a:r>
+          </a:p>
+          <a:p>
+            <a:r>
+              <a:rPr lang="es-AR" sz="1200" b="0" i="0" dirty="0" err="1">
+                <a:effectLst/>
+                <a:latin typeface="Menlo"/>
+              </a:rPr>
+              <a:t>title</a:t>
+            </a:r>
+            <a:r>
+              <a:rPr lang="es-AR" sz="1200" b="0" i="0" dirty="0">
+                <a:effectLst/>
+                <a:latin typeface="Menlo"/>
+              </a:rPr>
+              <a:t>(</a:t>
+            </a:r>
+            <a:r>
+              <a:rPr lang="es-AR" sz="1200" b="0" i="0" dirty="0">
+                <a:solidFill>
+                  <a:srgbClr val="A709F5"/>
+                </a:solidFill>
+                <a:effectLst/>
+                <a:latin typeface="Menlo"/>
+              </a:rPr>
+              <a:t>'Respuesta en frecuencia: N=10 vs N=100 vs N=1000'</a:t>
+            </a:r>
+            <a:r>
+              <a:rPr lang="es-AR" sz="1200" b="0" i="0" dirty="0">
+                <a:effectLst/>
+                <a:latin typeface="Menlo"/>
+              </a:rPr>
+              <a:t>);</a:t>
+            </a:r>
+          </a:p>
+        </p:txBody>
+      </p:sp>
+      <p:sp>
+        <p:nvSpPr>
+          <p:cNvPr id="23" name="Text 21"/>
+          <p:cNvSpPr/>
+          <p:nvPr/>
+        </p:nvSpPr>
+        <p:spPr>
+          <a:xfrm>
+            <a:off x="457200" y="804672"/>
+            <a:ext cx="4114800" cy="384048"/>
+          </a:xfrm>
+          <a:prstGeom prst="rect">
+            <a:avLst/>
+          </a:prstGeom>
+          <a:noFill/>
+          <a:ln/>
+        </p:spPr>
+        <p:txBody>
+          <a:bodyPr wrap="square" lIns="0" tIns="0" rIns="0" bIns="0" rtlCol="0" anchor="ctr"/>
+          <a:lstStyle/>
+          <a:p>
+            <a:pPr marL="0" indent="0">
+              <a:buNone/>
+            </a:pPr>
+            <a:r>
+              <a:rPr lang="en-US" sz="1100" b="1" dirty="0">
+                <a:solidFill>
+                  <a:srgbClr val="1E3A5F"/>
+                </a:solidFill>
+                <a:latin typeface="Calibri" pitchFamily="34" charset="0"/>
+                <a:ea typeface="Calibri" pitchFamily="34" charset="-122"/>
+                <a:cs typeface="Calibri" pitchFamily="34" charset="-120"/>
+              </a:rPr>
+              <a:t>filtro_pto4.m  (generado por filterDesigner)</a:t>
+            </a:r>
+            <a:endParaRPr lang="en-US" sz="1100" dirty="0"/>
+          </a:p>
+        </p:txBody>
+      </p:sp>
+      <p:sp>
+        <p:nvSpPr>
+          <p:cNvPr id="24" name="Text 22"/>
+          <p:cNvSpPr/>
+          <p:nvPr/>
+        </p:nvSpPr>
+        <p:spPr>
+          <a:xfrm>
+            <a:off x="966893" y="1421892"/>
+            <a:ext cx="4114800" cy="3429000"/>
+          </a:xfrm>
+          <a:prstGeom prst="rect">
+            <a:avLst/>
+          </a:prstGeom>
+          <a:noFill/>
+          <a:ln/>
+        </p:spPr>
+        <p:txBody>
+          <a:bodyPr wrap="square" lIns="0" tIns="0" rIns="0" bIns="0" rtlCol="0" anchor="t"/>
+          <a:lstStyle/>
+          <a:p>
+            <a:pPr marL="0" indent="0">
+              <a:buNone/>
+            </a:pPr>
+            <a:endParaRPr lang="en-US" sz="1050" dirty="0"/>
+          </a:p>
+        </p:txBody>
+      </p:sp>
+    </p:spTree>
+    <p:extLst>
+      <p:ext uri="{BB962C8B-B14F-4D97-AF65-F5344CB8AC3E}">
+        <p14:creationId xmlns:p14="http://schemas.microsoft.com/office/powerpoint/2010/main" val="76932925"/>
+      </p:ext>
+    </p:extLst>
+  </p:cSld>
+  <p:clrMapOvr>
+    <a:masterClrMapping/>
+  </p:clrMapOvr>
+</p:sld>
+</file>
+
+<file path=ppt/slides/slide5.xml><?xml version="1.0" encoding="utf-8"?>
+<p:sld xmlns:a="http://schemas.openxmlformats.org/drawingml/2006/main" xmlns:r="http://schemas.openxmlformats.org/officeDocument/2006/relationships" xmlns:p="http://schemas.openxmlformats.org/presentationml/2006/main">
   <p:cSld name="Slide 4">
     <p:bg>
       <p:bgPr>
@@ -3804,7 +4637,7 @@
 </p:sld>
 </file>
 
-<file path=ppt/slides/slide5.xml><?xml version="1.0" encoding="utf-8"?>
+<file path=ppt/slides/slide6.xml><?xml version="1.0" encoding="utf-8"?>
 <p:sld xmlns:a="http://schemas.openxmlformats.org/drawingml/2006/main" xmlns:r="http://schemas.openxmlformats.org/officeDocument/2006/relationships" xmlns:p="http://schemas.openxmlformats.org/presentationml/2006/main">
   <p:cSld name="Slide 5">
     <p:bg>
@@ -3853,6 +4686,13 @@
             <a:prstDash val="solid"/>
           </a:ln>
         </p:spPr>
+        <p:txBody>
+          <a:bodyPr/>
+          <a:lstStyle/>
+          <a:p>
+            <a:endParaRPr lang="es-AR" dirty="0"/>
+          </a:p>
+        </p:txBody>
       </p:sp>
       <p:sp>
         <p:nvSpPr>
@@ -3887,7 +4727,18 @@
                 <a:ea typeface="Calibri" pitchFamily="34" charset="-122"/>
                 <a:cs typeface="Calibri" pitchFamily="34" charset="-120"/>
               </a:rPr>
-              <a:t>Puntos d–f: Aplicación del Filtro y Graficación</a:t>
+              <a:t>Puntos d–f: Aplicación del Filtro y </a:t>
+            </a:r>
+            <a:r>
+              <a:rPr lang="en-US" sz="2000" b="1" dirty="0" err="1">
+                <a:solidFill>
+                  <a:srgbClr val="FFFFFF"/>
+                </a:solidFill>
+                <a:latin typeface="Calibri" pitchFamily="34" charset="0"/>
+                <a:ea typeface="Calibri" pitchFamily="34" charset="-122"/>
+                <a:cs typeface="Calibri" pitchFamily="34" charset="-120"/>
+              </a:rPr>
+              <a:t>Gráficas</a:t>
             </a:r>
             <a:endParaRPr lang="en-US" sz="2000" dirty="0"/>
           </a:p>
@@ -5034,7 +5885,7 @@
 </p:sld>
 </file>
 
-<file path=ppt/slides/slide6.xml><?xml version="1.0" encoding="utf-8"?>
+<file path=ppt/slides/slide7.xml><?xml version="1.0" encoding="utf-8"?>
 <p:sld xmlns:a="http://schemas.openxmlformats.org/drawingml/2006/main" xmlns:r="http://schemas.openxmlformats.org/officeDocument/2006/relationships" xmlns:p="http://schemas.openxmlformats.org/presentationml/2006/main">
   <p:cSld name="Slide 6">
     <p:bg>

--- a/Tp5/TP5_Ejercicio4.pptx
+++ b/Tp5/TP5_Ejercicio4.pptx
@@ -3325,84 +3325,6 @@
                 <a:cs typeface="Calibri" pitchFamily="34" charset="-120"/>
               </a:rPr>
               <a:t>44 100 Hz</a:t>
-            </a:r>
-            <a:endParaRPr lang="en-US" sz="1200" dirty="0"/>
-          </a:p>
-        </p:txBody>
-      </p:sp>
-      <p:sp>
-        <p:nvSpPr>
-          <p:cNvPr id="20" name="Text 18"/>
-          <p:cNvSpPr/>
-          <p:nvPr/>
-        </p:nvSpPr>
-        <p:spPr>
-          <a:xfrm>
-            <a:off x="457200" y="4114800"/>
-            <a:ext cx="1463040" cy="347472"/>
-          </a:xfrm>
-          <a:prstGeom prst="rect">
-            <a:avLst/>
-          </a:prstGeom>
-          <a:noFill/>
-          <a:ln/>
-        </p:spPr>
-        <p:txBody>
-          <a:bodyPr wrap="square" lIns="0" tIns="0" rIns="0" bIns="0" rtlCol="0" anchor="ctr"/>
-          <a:lstStyle/>
-          <a:p>
-            <a:pPr marL="0" indent="0">
-              <a:buNone/>
-            </a:pPr>
-            <a:r>
-              <a:rPr lang="en-US" sz="1200" b="1" dirty="0">
-                <a:solidFill>
-                  <a:srgbClr val="1E3A5F"/>
-                </a:solidFill>
-                <a:latin typeface="Calibri" pitchFamily="34" charset="0"/>
-                <a:ea typeface="Calibri" pitchFamily="34" charset="-122"/>
-                <a:cs typeface="Calibri" pitchFamily="34" charset="-120"/>
-              </a:rPr>
-              <a:t>Formato:</a:t>
-            </a:r>
-            <a:endParaRPr lang="en-US" sz="1200" dirty="0"/>
-          </a:p>
-        </p:txBody>
-      </p:sp>
-      <p:sp>
-        <p:nvSpPr>
-          <p:cNvPr id="21" name="Text 19"/>
-          <p:cNvSpPr/>
-          <p:nvPr/>
-        </p:nvSpPr>
-        <p:spPr>
-          <a:xfrm>
-            <a:off x="1920240" y="4114800"/>
-            <a:ext cx="2286000" cy="347472"/>
-          </a:xfrm>
-          <a:prstGeom prst="rect">
-            <a:avLst/>
-          </a:prstGeom>
-          <a:noFill/>
-          <a:ln/>
-        </p:spPr>
-        <p:txBody>
-          <a:bodyPr wrap="square" lIns="0" tIns="0" rIns="0" bIns="0" rtlCol="0" anchor="ctr"/>
-          <a:lstStyle/>
-          <a:p>
-            <a:pPr marL="0" indent="0">
-              <a:buNone/>
-            </a:pPr>
-            <a:r>
-              <a:rPr lang="en-US" sz="1200" dirty="0">
-                <a:solidFill>
-                  <a:srgbClr val="1A1A2E"/>
-                </a:solidFill>
-                <a:latin typeface="Calibri" pitchFamily="34" charset="0"/>
-                <a:ea typeface="Calibri" pitchFamily="34" charset="-122"/>
-                <a:cs typeface="Calibri" pitchFamily="34" charset="-120"/>
-              </a:rPr>
-              <a:t>Punto flotante, doble</a:t>
             </a:r>
             <a:endParaRPr lang="en-US" sz="1200" dirty="0"/>
           </a:p>
